--- a/Planning docs/Slides/lesson-32-1-teacher-slides.pptx
+++ b/Planning docs/Slides/lesson-32-1-teacher-slides.pptx
@@ -517,7 +517,7 @@
           <a:p>
             <a:r>
               <a:rPr lang="en-US" dirty="0"/>
-              <a:t>Lesson 32.1. Reading: Reading: Week 32.</a:t>
+              <a:t>Lesson 32.1. Reading: .</a:t>
             </a:r>
             <a:endParaRPr lang="en-US" dirty="0"/>
           </a:p>
@@ -2321,7 +2321,7 @@
                 <a:ea typeface="Calibri" pitchFamily="34" charset="-122"/>
                 <a:cs typeface="Calibri" pitchFamily="34" charset="-120"/>
               </a:rPr>
-              <a:t>Lesson 32.1  ·  Reading: Week 32</a:t>
+              <a:t>Lesson 32.1</a:t>
             </a:r>
             <a:endParaRPr lang="en-US" sz="2000" dirty="0"/>
           </a:p>
@@ -5358,121 +5358,9 @@
                 <a:ea typeface="Calibri" pitchFamily="34" charset="-122"/>
                 <a:cs typeface="Calibri" pitchFamily="34" charset="-120"/>
               </a:rPr>
-              <a:t>Reading: Week 32</a:t>
+              <a:t>Today’s chapters</a:t>
             </a:r>
             <a:endParaRPr lang="en-US" sz="2600" dirty="0"/>
-          </a:p>
-        </p:txBody>
-      </p:sp>
-      <p:sp>
-        <p:nvSpPr>
-          <p:cNvPr id="5" name="Text 3"/>
-          <p:cNvSpPr/>
-          <p:nvPr/>
-        </p:nvSpPr>
-        <p:spPr>
-          <a:xfrm>
-            <a:off x="365760" y="1463040"/>
-            <a:ext cx="8229600" cy="237744"/>
-          </a:xfrm>
-          <a:prstGeom prst="rect">
-            <a:avLst/>
-          </a:prstGeom>
-          <a:noFill/>
-          <a:ln/>
-        </p:spPr>
-        <p:txBody>
-          <a:bodyPr wrap="square" lIns="0" tIns="0" rIns="0" bIns="0" rtlCol="0" anchor="ctr"/>
-          <a:lstStyle/>
-          <a:p>
-            <a:pPr indent="0" marL="0">
-              <a:buNone/>
-            </a:pPr>
-            <a:r>
-              <a:rPr lang="en-US" sz="1100" b="1" spc="100" kern="0" dirty="0">
-                <a:solidFill>
-                  <a:srgbClr val="C7922C"/>
-                </a:solidFill>
-                <a:latin typeface="Calibri" pitchFamily="34" charset="0"/>
-                <a:ea typeface="Calibri" pitchFamily="34" charset="-122"/>
-                <a:cs typeface="Calibri" pitchFamily="34" charset="-120"/>
-              </a:rPr>
-              <a:t>PAUSE &amp; THINK</a:t>
-            </a:r>
-            <a:endParaRPr lang="en-US" sz="1100" dirty="0"/>
-          </a:p>
-        </p:txBody>
-      </p:sp>
-      <p:sp>
-        <p:nvSpPr>
-          <p:cNvPr id="6" name="Text 4"/>
-          <p:cNvSpPr/>
-          <p:nvPr/>
-        </p:nvSpPr>
-        <p:spPr>
-          <a:xfrm>
-            <a:off x="365760" y="1719072"/>
-            <a:ext cx="8412480" cy="914400"/>
-          </a:xfrm>
-          <a:prstGeom prst="rect">
-            <a:avLst/>
-          </a:prstGeom>
-          <a:noFill/>
-          <a:ln/>
-        </p:spPr>
-        <p:txBody>
-          <a:bodyPr wrap="square" lIns="0" tIns="0" rIns="0" bIns="0" rtlCol="0" anchor="ctr"/>
-          <a:lstStyle/>
-          <a:p>
-            <a:pPr indent="0" marL="0">
-              <a:buNone/>
-            </a:pPr>
-            <a:r>
-              <a:rPr lang="en-US" sz="1500" dirty="0">
-                <a:solidFill>
-                  <a:srgbClr val="1E293B"/>
-                </a:solidFill>
-                <a:latin typeface="Calibri" pitchFamily="34" charset="0"/>
-                <a:ea typeface="Calibri" pitchFamily="34" charset="-122"/>
-                <a:cs typeface="Calibri" pitchFamily="34" charset="-120"/>
-              </a:rPr>
-              <a:t>•  Reflect on how reading skills have grown.</a:t>
-            </a:r>
-            <a:endParaRPr lang="en-US" sz="1500" dirty="0"/>
-          </a:p>
-          <a:p>
-            <a:pPr indent="0" marL="0">
-              <a:buNone/>
-            </a:pPr>
-            <a:r>
-              <a:rPr lang="en-US" sz="1500" dirty="0">
-                <a:solidFill>
-                  <a:srgbClr val="1E293B"/>
-                </a:solidFill>
-                <a:latin typeface="Calibri" pitchFamily="34" charset="0"/>
-                <a:ea typeface="Calibri" pitchFamily="34" charset="-122"/>
-                <a:cs typeface="Calibri" pitchFamily="34" charset="-120"/>
-              </a:rPr>
-              <a:t>•  As you read today, ask yourself: What does it mean to have good character — and which character from our novels best shows it?</a:t>
-            </a:r>
-            <a:endParaRPr lang="en-US" sz="1500" dirty="0"/>
-          </a:p>
-          <a:p>
-            <a:pPr indent="0" marL="0">
-              <a:buNone/>
-            </a:pPr>
-            <a:r>
-              <a:rPr lang="en-US" sz="1500" dirty="0">
-                <a:solidFill>
-                  <a:srgbClr val="1E293B"/>
-                </a:solidFill>
-                <a:latin typeface="Calibri" pitchFamily="34" charset="0"/>
-                <a:ea typeface="Calibri" pitchFamily="34" charset="-122"/>
-                <a:cs typeface="Calibri" pitchFamily="34" charset="-120"/>
-              </a:rPr>
-              <a:t>•  Choose the character from this year's novels that you want to write your culmination project about. Write their name, the novel they come from, and one sentence explaining why you chose them.</a:t>
-            </a:r>
-            <a:endParaRPr lang="en-US" sz="1500" dirty="0"/>
           </a:p>
         </p:txBody>
       </p:sp>
@@ -6581,13 +6469,13 @@
             <a:r>
               <a:rPr lang="en-US" sz="1100" b="1" spc="100" kern="0" dirty="0">
                 <a:solidFill>
-                  <a:srgbClr val="8B6FC0"/>
-                </a:solidFill>
-                <a:latin typeface="Calibri" pitchFamily="34" charset="0"/>
-                <a:ea typeface="Calibri" pitchFamily="34" charset="-122"/>
-                <a:cs typeface="Calibri" pitchFamily="34" charset="-120"/>
-              </a:rPr>
-              <a:t>READING</a:t>
+                  <a:srgbClr val="C7922C"/>
+                </a:solidFill>
+                <a:latin typeface="Calibri" pitchFamily="34" charset="0"/>
+                <a:ea typeface="Calibri" pitchFamily="34" charset="-122"/>
+                <a:cs typeface="Calibri" pitchFamily="34" charset="-120"/>
+              </a:rPr>
+              <a:t>BIG QUESTION</a:t>
             </a:r>
             <a:endParaRPr lang="en-US" sz="1100" dirty="0"/>
           </a:p>
@@ -6595,91 +6483,13 @@
       </p:sp>
       <p:sp>
         <p:nvSpPr>
-          <p:cNvPr id="5" name="Text 3"/>
+          <p:cNvPr id="5" name="Shape 3"/>
           <p:cNvSpPr/>
           <p:nvPr/>
         </p:nvSpPr>
         <p:spPr>
           <a:xfrm>
             <a:off x="365760" y="1014984"/>
-            <a:ext cx="8412480" cy="365760"/>
-          </a:xfrm>
-          <a:prstGeom prst="rect">
-            <a:avLst/>
-          </a:prstGeom>
-          <a:noFill/>
-          <a:ln/>
-        </p:spPr>
-        <p:txBody>
-          <a:bodyPr wrap="square" lIns="0" tIns="0" rIns="0" bIns="0" rtlCol="0" anchor="ctr"/>
-          <a:lstStyle/>
-          <a:p>
-            <a:pPr indent="0" marL="0">
-              <a:buNone/>
-            </a:pPr>
-            <a:r>
-              <a:rPr lang="en-US" sz="2000" b="1" dirty="0">
-                <a:solidFill>
-                  <a:srgbClr val="0E1C42"/>
-                </a:solidFill>
-                <a:latin typeface="Calibri" pitchFamily="34" charset="0"/>
-                <a:ea typeface="Calibri" pitchFamily="34" charset="-122"/>
-                <a:cs typeface="Calibri" pitchFamily="34" charset="-120"/>
-              </a:rPr>
-              <a:t>Reading: Week 32</a:t>
-            </a:r>
-            <a:endParaRPr lang="en-US" sz="2000" dirty="0"/>
-          </a:p>
-        </p:txBody>
-      </p:sp>
-      <p:sp>
-        <p:nvSpPr>
-          <p:cNvPr id="6" name="Text 4"/>
-          <p:cNvSpPr/>
-          <p:nvPr/>
-        </p:nvSpPr>
-        <p:spPr>
-          <a:xfrm>
-            <a:off x="365760" y="1508760"/>
-            <a:ext cx="8229600" cy="237744"/>
-          </a:xfrm>
-          <a:prstGeom prst="rect">
-            <a:avLst/>
-          </a:prstGeom>
-          <a:noFill/>
-          <a:ln/>
-        </p:spPr>
-        <p:txBody>
-          <a:bodyPr wrap="square" lIns="0" tIns="0" rIns="0" bIns="0" rtlCol="0" anchor="ctr"/>
-          <a:lstStyle/>
-          <a:p>
-            <a:pPr indent="0" marL="0">
-              <a:buNone/>
-            </a:pPr>
-            <a:r>
-              <a:rPr lang="en-US" sz="1100" b="1" spc="100" kern="0" dirty="0">
-                <a:solidFill>
-                  <a:srgbClr val="C7922C"/>
-                </a:solidFill>
-                <a:latin typeface="Calibri" pitchFamily="34" charset="0"/>
-                <a:ea typeface="Calibri" pitchFamily="34" charset="-122"/>
-                <a:cs typeface="Calibri" pitchFamily="34" charset="-120"/>
-              </a:rPr>
-              <a:t>BIG QUESTION</a:t>
-            </a:r>
-            <a:endParaRPr lang="en-US" sz="1100" dirty="0"/>
-          </a:p>
-        </p:txBody>
-      </p:sp>
-      <p:sp>
-        <p:nvSpPr>
-          <p:cNvPr id="7" name="Shape 5"/>
-          <p:cNvSpPr/>
-          <p:nvPr/>
-        </p:nvSpPr>
-        <p:spPr>
-          <a:xfrm>
-            <a:off x="365760" y="1746504"/>
             <a:ext cx="8412480" cy="731520"/>
           </a:xfrm>
           <a:prstGeom prst="roundRect">
@@ -6707,91 +6517,91 @@
       </p:sp>
       <p:sp>
         <p:nvSpPr>
+          <p:cNvPr id="6" name="Text 4"/>
+          <p:cNvSpPr/>
+          <p:nvPr/>
+        </p:nvSpPr>
+        <p:spPr>
+          <a:xfrm>
+            <a:off x="594360" y="1143000"/>
+            <a:ext cx="7955280" cy="475488"/>
+          </a:xfrm>
+          <a:prstGeom prst="rect">
+            <a:avLst/>
+          </a:prstGeom>
+          <a:noFill/>
+          <a:ln/>
+        </p:spPr>
+        <p:txBody>
+          <a:bodyPr wrap="square" lIns="0" tIns="0" rIns="0" bIns="0" rtlCol="0" anchor="ctr"/>
+          <a:lstStyle/>
+          <a:p>
+            <a:pPr indent="0" marL="0">
+              <a:buNone/>
+            </a:pPr>
+            <a:r>
+              <a:rPr lang="en-US" sz="1700" dirty="0">
+                <a:solidFill>
+                  <a:srgbClr val="1E293B"/>
+                </a:solidFill>
+                <a:latin typeface="Calibri" pitchFamily="34" charset="0"/>
+                <a:ea typeface="Calibri" pitchFamily="34" charset="-122"/>
+                <a:cs typeface="Calibri" pitchFamily="34" charset="-120"/>
+              </a:rPr>
+              <a:t>Reflect on how reading skills have grown.</a:t>
+            </a:r>
+            <a:endParaRPr lang="en-US" sz="1700" dirty="0"/>
+          </a:p>
+        </p:txBody>
+      </p:sp>
+      <p:sp>
+        <p:nvSpPr>
+          <p:cNvPr id="7" name="Text 5"/>
+          <p:cNvSpPr/>
+          <p:nvPr/>
+        </p:nvSpPr>
+        <p:spPr>
+          <a:xfrm>
+            <a:off x="365760" y="1874520"/>
+            <a:ext cx="8229600" cy="237744"/>
+          </a:xfrm>
+          <a:prstGeom prst="rect">
+            <a:avLst/>
+          </a:prstGeom>
+          <a:noFill/>
+          <a:ln/>
+        </p:spPr>
+        <p:txBody>
+          <a:bodyPr wrap="square" lIns="0" tIns="0" rIns="0" bIns="0" rtlCol="0" anchor="ctr"/>
+          <a:lstStyle/>
+          <a:p>
+            <a:pPr indent="0" marL="0">
+              <a:buNone/>
+            </a:pPr>
+            <a:r>
+              <a:rPr lang="en-US" sz="1100" b="1" spc="100" kern="0" dirty="0">
+                <a:solidFill>
+                  <a:srgbClr val="55C8E8"/>
+                </a:solidFill>
+                <a:latin typeface="Calibri" pitchFamily="34" charset="0"/>
+                <a:ea typeface="Calibri" pitchFamily="34" charset="-122"/>
+                <a:cs typeface="Calibri" pitchFamily="34" charset="-120"/>
+              </a:rPr>
+              <a:t>READING LENS</a:t>
+            </a:r>
+            <a:endParaRPr lang="en-US" sz="1100" dirty="0"/>
+          </a:p>
+        </p:txBody>
+      </p:sp>
+      <p:sp>
+        <p:nvSpPr>
           <p:cNvPr id="8" name="Text 6"/>
           <p:cNvSpPr/>
           <p:nvPr/>
         </p:nvSpPr>
         <p:spPr>
           <a:xfrm>
-            <a:off x="594360" y="1874520"/>
-            <a:ext cx="7955280" cy="475488"/>
-          </a:xfrm>
-          <a:prstGeom prst="rect">
-            <a:avLst/>
-          </a:prstGeom>
-          <a:noFill/>
-          <a:ln/>
-        </p:spPr>
-        <p:txBody>
-          <a:bodyPr wrap="square" lIns="0" tIns="0" rIns="0" bIns="0" rtlCol="0" anchor="ctr"/>
-          <a:lstStyle/>
-          <a:p>
-            <a:pPr indent="0" marL="0">
-              <a:buNone/>
-            </a:pPr>
-            <a:r>
-              <a:rPr lang="en-US" sz="1700" dirty="0">
-                <a:solidFill>
-                  <a:srgbClr val="1E293B"/>
-                </a:solidFill>
-                <a:latin typeface="Calibri" pitchFamily="34" charset="0"/>
-                <a:ea typeface="Calibri" pitchFamily="34" charset="-122"/>
-                <a:cs typeface="Calibri" pitchFamily="34" charset="-120"/>
-              </a:rPr>
-              <a:t>Reflect on how reading skills have grown.</a:t>
-            </a:r>
-            <a:endParaRPr lang="en-US" sz="1700" dirty="0"/>
-          </a:p>
-        </p:txBody>
-      </p:sp>
-      <p:sp>
-        <p:nvSpPr>
-          <p:cNvPr id="9" name="Text 7"/>
-          <p:cNvSpPr/>
-          <p:nvPr/>
-        </p:nvSpPr>
-        <p:spPr>
-          <a:xfrm>
-            <a:off x="365760" y="2606040"/>
-            <a:ext cx="8229600" cy="237744"/>
-          </a:xfrm>
-          <a:prstGeom prst="rect">
-            <a:avLst/>
-          </a:prstGeom>
-          <a:noFill/>
-          <a:ln/>
-        </p:spPr>
-        <p:txBody>
-          <a:bodyPr wrap="square" lIns="0" tIns="0" rIns="0" bIns="0" rtlCol="0" anchor="ctr"/>
-          <a:lstStyle/>
-          <a:p>
-            <a:pPr indent="0" marL="0">
-              <a:buNone/>
-            </a:pPr>
-            <a:r>
-              <a:rPr lang="en-US" sz="1100" b="1" spc="100" kern="0" dirty="0">
-                <a:solidFill>
-                  <a:srgbClr val="55C8E8"/>
-                </a:solidFill>
-                <a:latin typeface="Calibri" pitchFamily="34" charset="0"/>
-                <a:ea typeface="Calibri" pitchFamily="34" charset="-122"/>
-                <a:cs typeface="Calibri" pitchFamily="34" charset="-120"/>
-              </a:rPr>
-              <a:t>READING LENS</a:t>
-            </a:r>
-            <a:endParaRPr lang="en-US" sz="1100" dirty="0"/>
-          </a:p>
-        </p:txBody>
-      </p:sp>
-      <p:sp>
-        <p:nvSpPr>
-          <p:cNvPr id="10" name="Text 8"/>
-          <p:cNvSpPr/>
-          <p:nvPr/>
-        </p:nvSpPr>
-        <p:spPr>
-          <a:xfrm>
-            <a:off x="365760" y="2843784"/>
+            <a:off x="365760" y="2112264"/>
             <a:ext cx="8412480" cy="914400"/>
           </a:xfrm>
           <a:prstGeom prst="rect">
